--- a/dist/초5/수학/분수의성질/초5_수학_분수의성질_03_통분과크기비교_학생용.pptx
+++ b/dist/초5/수학/분수의성질/초5_수학_분수의성질_03_통분과크기비교_학생용.pptx
@@ -120,13 +120,13 @@
   <p:extLst>
     <p:ext uri="{521415D9-36F7-43E2-AB2F-B90AF26B5E84}">
       <p14:sectionLst xmlns:p14="http://schemas.microsoft.com/office/powerpoint/2010/main">
-        <p14:section name="도입" id="{68eaa60e-bad6-313c-7f6a-e40e1b194612}">
+        <p14:section name="도입" id="{5de83099-8e32-4fd4-4fca-7a2af9080416}">
           <p14:sldIdLst>
             <p14:sldId id="256"/>
             <p14:sldId id="257"/>
           </p14:sldIdLst>
         </p14:section>
-        <p14:section name="개념" id="{ca049ecf-7be0-3c69-bbca-e828cf170915}">
+        <p14:section name="개념" id="{333e6e21-3f06-4092-64d0-7f16e0204bd9}">
           <p14:sldIdLst>
             <p14:sldId id="258"/>
             <p14:sldId id="259"/>
@@ -135,31 +135,31 @@
             <p14:sldId id="263"/>
           </p14:sldIdLst>
         </p14:section>
-        <p14:section name="연습" id="{6c341b9c-898e-80b5-deb7-f17016508df4}">
+        <p14:section name="연습" id="{2900b81a-fff2-760d-533a-19c021f76618}">
           <p14:sldIdLst>
             <p14:sldId id="262"/>
             <p14:sldId id="264"/>
             <p14:sldId id="265"/>
           </p14:sldIdLst>
         </p14:section>
-        <p14:section name="개념" id="{2103b427-655d-942e-b7af-3dc4ca5c0af8}">
+        <p14:section name="개념" id="{51f5f464-2124-f721-a88c-3dfea052c98a}">
           <p14:sldIdLst/>
         </p14:section>
-        <p14:section name="연습" id="{cb1a1554-18b7-bff6-f269-391514e87e85}">
+        <p14:section name="연습" id="{19e129e7-f4a8-02f9-1345-f47fef9f195c}">
           <p14:sldIdLst/>
         </p14:section>
-        <p14:section name="확인" id="{0162a8b5-7242-4f44-3f94-617a16c8be0c}">
+        <p14:section name="확인" id="{c1b945a3-beb4-4ccf-7a22-b44e7085fd32}">
           <p14:sldIdLst>
             <p14:sldId id="266"/>
             <p14:sldId id="267"/>
           </p14:sldIdLst>
         </p14:section>
-        <p14:section name="정리" id="{a6dfda20-b22d-3bc2-0b0d-8204658e4586}">
+        <p14:section name="정리" id="{27eaca9a-5a64-a39c-d4a6-5315df6bd3cf}">
           <p14:sldIdLst>
             <p14:sldId id="268"/>
           </p14:sldIdLst>
         </p14:section>
-        <p14:section name="보충" id="{3120e501-b4eb-9ac6-ad1c-b2a2b35ff8b7}">
+        <p14:section name="보충" id="{fd410098-ea1b-979f-0a04-bd04baa06961}">
           <p14:sldIdLst>
             <p14:sldId id="269"/>
           </p14:sldIdLst>
